--- a/Presentation/ppt/Pehchaan_Careers_Hindi.pptx
+++ b/Presentation/ppt/Pehchaan_Careers_Hindi.pptx
@@ -12,7 +12,7 @@
     <p:sldId id="257" r:id="rId3"/>
     <p:sldId id="267" r:id="rId4"/>
     <p:sldId id="258" r:id="rId5"/>
-    <p:sldId id="268" r:id="rId6"/>
+    <p:sldId id="271" r:id="rId6"/>
     <p:sldId id="259" r:id="rId7"/>
     <p:sldId id="262" r:id="rId8"/>
     <p:sldId id="263" r:id="rId9"/>
@@ -123,7 +123,7 @@
             <p14:sldId id="257"/>
             <p14:sldId id="267"/>
             <p14:sldId id="258"/>
-            <p14:sldId id="268"/>
+            <p14:sldId id="271"/>
             <p14:sldId id="259"/>
             <p14:sldId id="262"/>
             <p14:sldId id="263"/>
@@ -6400,7 +6400,7 @@
                 <a:ea typeface="Calibri" pitchFamily="34" charset="-122"/>
                 <a:cs typeface="Calibri" pitchFamily="34" charset="-120"/>
               </a:rPr>
-              <a:t>चाहे आपका रास्ता कॉर्पोरेट हो, क्रिएटिव, सरकारी, MBA या विदेश — ये 9 कौशल तय करते हैं आप कहाँ तक जाएंगे।</a:t>
+              <a:t>चाहे आपका रास्ता कॉर्पोरेट हो, क्रिएटिव, सरकारी, MBA या विदेश — ये 12 कौशल तय करते हैं आप कहाँ तक जाएंगे।</a:t>
             </a:r>
             <a:endParaRPr lang="en-US" sz="1300" dirty="0"/>
           </a:p>
@@ -6414,8 +6414,8 @@
         </p:nvSpPr>
         <p:spPr>
           <a:xfrm>
-            <a:off x="457200" y="1170432"/>
-            <a:ext cx="2651760" cy="804672"/>
+            <a:off x="457200" y="1117092"/>
+            <a:ext cx="2651760" cy="738000"/>
           </a:xfrm>
           <a:prstGeom prst="rect">
             <a:avLst/>
@@ -6439,8 +6439,8 @@
         </p:nvSpPr>
         <p:spPr>
           <a:xfrm>
-            <a:off x="457200" y="1170432"/>
-            <a:ext cx="73152" cy="804672"/>
+            <a:off x="457200" y="1117092"/>
+            <a:ext cx="73152" cy="738000"/>
           </a:xfrm>
           <a:prstGeom prst="rect">
             <a:avLst/>
@@ -6464,7 +6464,7 @@
         </p:nvSpPr>
         <p:spPr>
           <a:xfrm>
-            <a:off x="2761488" y="1225296"/>
+            <a:off x="2822904" y="1171956"/>
             <a:ext cx="274320" cy="182880"/>
           </a:xfrm>
           <a:prstGeom prst="rect">
@@ -6503,7 +6503,7 @@
         </p:nvSpPr>
         <p:spPr>
           <a:xfrm>
-            <a:off x="621792" y="1216152"/>
+            <a:off x="621792" y="1162812"/>
             <a:ext cx="2103120" cy="256032"/>
           </a:xfrm>
           <a:prstGeom prst="rect">
@@ -6542,7 +6542,7 @@
         </p:nvSpPr>
         <p:spPr>
           <a:xfrm>
-            <a:off x="621792" y="1490472"/>
+            <a:off x="621792" y="1437132"/>
             <a:ext cx="2520000" cy="438912"/>
           </a:xfrm>
           <a:prstGeom prst="rect">
@@ -6581,8 +6581,8 @@
         </p:nvSpPr>
         <p:spPr>
           <a:xfrm>
-            <a:off x="3355848" y="1170432"/>
-            <a:ext cx="2651760" cy="804672"/>
+            <a:off x="3355848" y="1117092"/>
+            <a:ext cx="2651760" cy="738000"/>
           </a:xfrm>
           <a:prstGeom prst="rect">
             <a:avLst/>
@@ -6606,8 +6606,8 @@
         </p:nvSpPr>
         <p:spPr>
           <a:xfrm>
-            <a:off x="3355848" y="1170432"/>
-            <a:ext cx="73152" cy="804672"/>
+            <a:off x="3355848" y="1117092"/>
+            <a:ext cx="73152" cy="738000"/>
           </a:xfrm>
           <a:prstGeom prst="rect">
             <a:avLst/>
@@ -6631,7 +6631,7 @@
         </p:nvSpPr>
         <p:spPr>
           <a:xfrm>
-            <a:off x="5660136" y="1225296"/>
+            <a:off x="5721552" y="1171956"/>
             <a:ext cx="274320" cy="182880"/>
           </a:xfrm>
           <a:prstGeom prst="rect">
@@ -6670,7 +6670,7 @@
         </p:nvSpPr>
         <p:spPr>
           <a:xfrm>
-            <a:off x="3520440" y="1216152"/>
+            <a:off x="3520440" y="1162812"/>
             <a:ext cx="2103120" cy="256032"/>
           </a:xfrm>
           <a:prstGeom prst="rect">
@@ -6709,7 +6709,7 @@
         </p:nvSpPr>
         <p:spPr>
           <a:xfrm>
-            <a:off x="3520440" y="1490472"/>
+            <a:off x="3520440" y="1437132"/>
             <a:ext cx="2520000" cy="438912"/>
           </a:xfrm>
           <a:prstGeom prst="rect">
@@ -6748,8 +6748,8 @@
         </p:nvSpPr>
         <p:spPr>
           <a:xfrm>
-            <a:off x="6254496" y="1170432"/>
-            <a:ext cx="2651760" cy="804672"/>
+            <a:off x="6254496" y="1117092"/>
+            <a:ext cx="2651760" cy="738000"/>
           </a:xfrm>
           <a:prstGeom prst="rect">
             <a:avLst/>
@@ -6773,8 +6773,8 @@
         </p:nvSpPr>
         <p:spPr>
           <a:xfrm>
-            <a:off x="6254496" y="1170432"/>
-            <a:ext cx="73152" cy="804672"/>
+            <a:off x="6254496" y="1117092"/>
+            <a:ext cx="73152" cy="738000"/>
           </a:xfrm>
           <a:prstGeom prst="rect">
             <a:avLst/>
@@ -6798,7 +6798,7 @@
         </p:nvSpPr>
         <p:spPr>
           <a:xfrm>
-            <a:off x="8558784" y="1225296"/>
+            <a:off x="8620200" y="1171956"/>
             <a:ext cx="274320" cy="182880"/>
           </a:xfrm>
           <a:prstGeom prst="rect">
@@ -6837,7 +6837,7 @@
         </p:nvSpPr>
         <p:spPr>
           <a:xfrm>
-            <a:off x="6419088" y="1216152"/>
+            <a:off x="6419088" y="1162812"/>
             <a:ext cx="2103120" cy="256032"/>
           </a:xfrm>
           <a:prstGeom prst="rect">
@@ -6876,7 +6876,7 @@
         </p:nvSpPr>
         <p:spPr>
           <a:xfrm>
-            <a:off x="6419088" y="1490472"/>
+            <a:off x="6419088" y="1437132"/>
             <a:ext cx="2520000" cy="438912"/>
           </a:xfrm>
           <a:prstGeom prst="rect">
@@ -6915,8 +6915,8 @@
         </p:nvSpPr>
         <p:spPr>
           <a:xfrm>
-            <a:off x="457200" y="2048256"/>
-            <a:ext cx="2651760" cy="804672"/>
+            <a:off x="457200" y="1936615"/>
+            <a:ext cx="2651760" cy="738000"/>
           </a:xfrm>
           <a:prstGeom prst="rect">
             <a:avLst/>
@@ -6940,8 +6940,8 @@
         </p:nvSpPr>
         <p:spPr>
           <a:xfrm>
-            <a:off x="457200" y="2048256"/>
-            <a:ext cx="73152" cy="804672"/>
+            <a:off x="457200" y="1936615"/>
+            <a:ext cx="73152" cy="738000"/>
           </a:xfrm>
           <a:prstGeom prst="rect">
             <a:avLst/>
@@ -6965,7 +6965,7 @@
         </p:nvSpPr>
         <p:spPr>
           <a:xfrm>
-            <a:off x="2761488" y="2103120"/>
+            <a:off x="2822904" y="1991479"/>
             <a:ext cx="274320" cy="182880"/>
           </a:xfrm>
           <a:prstGeom prst="rect">
@@ -7004,7 +7004,7 @@
         </p:nvSpPr>
         <p:spPr>
           <a:xfrm>
-            <a:off x="621792" y="2093976"/>
+            <a:off x="621792" y="1982335"/>
             <a:ext cx="2103120" cy="256032"/>
           </a:xfrm>
           <a:prstGeom prst="rect">
@@ -7043,7 +7043,7 @@
         </p:nvSpPr>
         <p:spPr>
           <a:xfrm>
-            <a:off x="621792" y="2368296"/>
+            <a:off x="621792" y="2256655"/>
             <a:ext cx="2520000" cy="438912"/>
           </a:xfrm>
           <a:prstGeom prst="rect">
@@ -7082,8 +7082,8 @@
         </p:nvSpPr>
         <p:spPr>
           <a:xfrm>
-            <a:off x="3355848" y="2048256"/>
-            <a:ext cx="2651760" cy="804672"/>
+            <a:off x="3355848" y="1936615"/>
+            <a:ext cx="2651760" cy="738000"/>
           </a:xfrm>
           <a:prstGeom prst="rect">
             <a:avLst/>
@@ -7107,8 +7107,8 @@
         </p:nvSpPr>
         <p:spPr>
           <a:xfrm>
-            <a:off x="3355848" y="2048256"/>
-            <a:ext cx="73152" cy="804672"/>
+            <a:off x="3355848" y="1936615"/>
+            <a:ext cx="73152" cy="738000"/>
           </a:xfrm>
           <a:prstGeom prst="rect">
             <a:avLst/>
@@ -7132,7 +7132,7 @@
         </p:nvSpPr>
         <p:spPr>
           <a:xfrm>
-            <a:off x="5660136" y="2103120"/>
+            <a:off x="5721552" y="1991479"/>
             <a:ext cx="274320" cy="182880"/>
           </a:xfrm>
           <a:prstGeom prst="rect">
@@ -7171,7 +7171,7 @@
         </p:nvSpPr>
         <p:spPr>
           <a:xfrm>
-            <a:off x="3520440" y="2093976"/>
+            <a:off x="3520440" y="1982335"/>
             <a:ext cx="2103120" cy="256032"/>
           </a:xfrm>
           <a:prstGeom prst="rect">
@@ -7210,7 +7210,7 @@
         </p:nvSpPr>
         <p:spPr>
           <a:xfrm>
-            <a:off x="3520440" y="2368296"/>
+            <a:off x="3520440" y="2256655"/>
             <a:ext cx="2520000" cy="438912"/>
           </a:xfrm>
           <a:prstGeom prst="rect">
@@ -7249,8 +7249,8 @@
         </p:nvSpPr>
         <p:spPr>
           <a:xfrm>
-            <a:off x="6254496" y="2048256"/>
-            <a:ext cx="2651760" cy="804672"/>
+            <a:off x="6254496" y="1936615"/>
+            <a:ext cx="2651760" cy="738000"/>
           </a:xfrm>
           <a:prstGeom prst="rect">
             <a:avLst/>
@@ -7274,8 +7274,8 @@
         </p:nvSpPr>
         <p:spPr>
           <a:xfrm>
-            <a:off x="6254496" y="2048256"/>
-            <a:ext cx="73152" cy="804672"/>
+            <a:off x="6254496" y="1936615"/>
+            <a:ext cx="73152" cy="738000"/>
           </a:xfrm>
           <a:prstGeom prst="rect">
             <a:avLst/>
@@ -7299,7 +7299,7 @@
         </p:nvSpPr>
         <p:spPr>
           <a:xfrm>
-            <a:off x="8558784" y="2103120"/>
+            <a:off x="8620200" y="1991479"/>
             <a:ext cx="274320" cy="182880"/>
           </a:xfrm>
           <a:prstGeom prst="rect">
@@ -7338,7 +7338,7 @@
         </p:nvSpPr>
         <p:spPr>
           <a:xfrm>
-            <a:off x="6419088" y="2093976"/>
+            <a:off x="6419088" y="1982335"/>
             <a:ext cx="2103120" cy="256032"/>
           </a:xfrm>
           <a:prstGeom prst="rect">
@@ -7377,7 +7377,7 @@
         </p:nvSpPr>
         <p:spPr>
           <a:xfrm>
-            <a:off x="6419088" y="2368296"/>
+            <a:off x="6419088" y="2256655"/>
             <a:ext cx="2520000" cy="438912"/>
           </a:xfrm>
           <a:prstGeom prst="rect">
@@ -7416,8 +7416,8 @@
         </p:nvSpPr>
         <p:spPr>
           <a:xfrm>
-            <a:off x="457200" y="2926080"/>
-            <a:ext cx="2651760" cy="804672"/>
+            <a:off x="457200" y="2758246"/>
+            <a:ext cx="2651760" cy="738000"/>
           </a:xfrm>
           <a:prstGeom prst="rect">
             <a:avLst/>
@@ -7441,8 +7441,8 @@
         </p:nvSpPr>
         <p:spPr>
           <a:xfrm>
-            <a:off x="457200" y="2926080"/>
-            <a:ext cx="73152" cy="804672"/>
+            <a:off x="457200" y="2758246"/>
+            <a:ext cx="73152" cy="738000"/>
           </a:xfrm>
           <a:prstGeom prst="rect">
             <a:avLst/>
@@ -7466,7 +7466,7 @@
         </p:nvSpPr>
         <p:spPr>
           <a:xfrm>
-            <a:off x="2761488" y="2980944"/>
+            <a:off x="2822904" y="2813110"/>
             <a:ext cx="274320" cy="182880"/>
           </a:xfrm>
           <a:prstGeom prst="rect">
@@ -7505,7 +7505,7 @@
         </p:nvSpPr>
         <p:spPr>
           <a:xfrm>
-            <a:off x="621792" y="2971800"/>
+            <a:off x="621792" y="2803966"/>
             <a:ext cx="2103120" cy="256032"/>
           </a:xfrm>
           <a:prstGeom prst="rect">
@@ -7544,7 +7544,7 @@
         </p:nvSpPr>
         <p:spPr>
           <a:xfrm>
-            <a:off x="621792" y="3246120"/>
+            <a:off x="621792" y="3078286"/>
             <a:ext cx="2520000" cy="438912"/>
           </a:xfrm>
           <a:prstGeom prst="rect">
@@ -7583,8 +7583,8 @@
         </p:nvSpPr>
         <p:spPr>
           <a:xfrm>
-            <a:off x="3355848" y="2926080"/>
-            <a:ext cx="2651760" cy="804672"/>
+            <a:off x="3355848" y="2758246"/>
+            <a:ext cx="2651760" cy="738000"/>
           </a:xfrm>
           <a:prstGeom prst="rect">
             <a:avLst/>
@@ -7608,8 +7608,8 @@
         </p:nvSpPr>
         <p:spPr>
           <a:xfrm>
-            <a:off x="3355848" y="2926080"/>
-            <a:ext cx="73152" cy="804672"/>
+            <a:off x="3355848" y="2758246"/>
+            <a:ext cx="73152" cy="738000"/>
           </a:xfrm>
           <a:prstGeom prst="rect">
             <a:avLst/>
@@ -7633,7 +7633,7 @@
         </p:nvSpPr>
         <p:spPr>
           <a:xfrm>
-            <a:off x="5660136" y="2980944"/>
+            <a:off x="5721552" y="2813110"/>
             <a:ext cx="274320" cy="182880"/>
           </a:xfrm>
           <a:prstGeom prst="rect">
@@ -7672,7 +7672,7 @@
         </p:nvSpPr>
         <p:spPr>
           <a:xfrm>
-            <a:off x="3520440" y="2971800"/>
+            <a:off x="3520440" y="2803966"/>
             <a:ext cx="2103120" cy="256032"/>
           </a:xfrm>
           <a:prstGeom prst="rect">
@@ -7711,7 +7711,7 @@
         </p:nvSpPr>
         <p:spPr>
           <a:xfrm>
-            <a:off x="3520440" y="3246120"/>
+            <a:off x="3520440" y="3078286"/>
             <a:ext cx="2520000" cy="438912"/>
           </a:xfrm>
           <a:prstGeom prst="rect">
@@ -7750,8 +7750,8 @@
         </p:nvSpPr>
         <p:spPr>
           <a:xfrm>
-            <a:off x="6254496" y="2926080"/>
-            <a:ext cx="2651760" cy="804672"/>
+            <a:off x="6254496" y="2758246"/>
+            <a:ext cx="2651760" cy="738000"/>
           </a:xfrm>
           <a:prstGeom prst="rect">
             <a:avLst/>
@@ -7775,8 +7775,8 @@
         </p:nvSpPr>
         <p:spPr>
           <a:xfrm>
-            <a:off x="6254496" y="2926080"/>
-            <a:ext cx="73152" cy="804672"/>
+            <a:off x="6254496" y="2758246"/>
+            <a:ext cx="73152" cy="738000"/>
           </a:xfrm>
           <a:prstGeom prst="rect">
             <a:avLst/>
@@ -7800,7 +7800,7 @@
         </p:nvSpPr>
         <p:spPr>
           <a:xfrm>
-            <a:off x="8558784" y="2980944"/>
+            <a:off x="8620200" y="2813110"/>
             <a:ext cx="274320" cy="182880"/>
           </a:xfrm>
           <a:prstGeom prst="rect">
@@ -7839,7 +7839,7 @@
         </p:nvSpPr>
         <p:spPr>
           <a:xfrm>
-            <a:off x="6419088" y="2971800"/>
+            <a:off x="6419088" y="2803966"/>
             <a:ext cx="2103120" cy="256032"/>
           </a:xfrm>
           <a:prstGeom prst="rect">
@@ -7878,7 +7878,7 @@
         </p:nvSpPr>
         <p:spPr>
           <a:xfrm>
-            <a:off x="6419088" y="3246120"/>
+            <a:off x="6419088" y="3078286"/>
             <a:ext cx="2520000" cy="438912"/>
           </a:xfrm>
           <a:prstGeom prst="rect">
@@ -7917,8 +7917,8 @@
         </p:nvSpPr>
         <p:spPr>
           <a:xfrm>
-            <a:off x="457200" y="4519753"/>
-            <a:ext cx="73152" cy="256032"/>
+            <a:off x="457200" y="4673600"/>
+            <a:ext cx="73152" cy="177800"/>
           </a:xfrm>
           <a:prstGeom prst="rect">
             <a:avLst/>
@@ -7942,8 +7942,8 @@
         </p:nvSpPr>
         <p:spPr>
           <a:xfrm>
-            <a:off x="594360" y="4519753"/>
-            <a:ext cx="1280160" cy="256032"/>
+            <a:off x="594360" y="4673600"/>
+            <a:ext cx="1280160" cy="177800"/>
           </a:xfrm>
           <a:prstGeom prst="rect">
             <a:avLst/>
@@ -7981,8 +7981,8 @@
         </p:nvSpPr>
         <p:spPr>
           <a:xfrm>
-            <a:off x="2103120" y="4519753"/>
-            <a:ext cx="73152" cy="256032"/>
+            <a:off x="2103120" y="4673600"/>
+            <a:ext cx="73152" cy="177800"/>
           </a:xfrm>
           <a:prstGeom prst="rect">
             <a:avLst/>
@@ -8006,8 +8006,8 @@
         </p:nvSpPr>
         <p:spPr>
           <a:xfrm>
-            <a:off x="2240280" y="4519753"/>
-            <a:ext cx="1463040" cy="256032"/>
+            <a:off x="2240280" y="4673600"/>
+            <a:ext cx="1463040" cy="177800"/>
           </a:xfrm>
           <a:prstGeom prst="rect">
             <a:avLst/>
@@ -8045,8 +8045,8 @@
         </p:nvSpPr>
         <p:spPr>
           <a:xfrm>
-            <a:off x="3931920" y="4519753"/>
-            <a:ext cx="73152" cy="256032"/>
+            <a:off x="3931920" y="4673600"/>
+            <a:ext cx="73152" cy="177800"/>
           </a:xfrm>
           <a:prstGeom prst="rect">
             <a:avLst/>
@@ -8070,8 +8070,8 @@
         </p:nvSpPr>
         <p:spPr>
           <a:xfrm>
-            <a:off x="4069080" y="4519753"/>
-            <a:ext cx="1097280" cy="256032"/>
+            <a:off x="4069080" y="4673600"/>
+            <a:ext cx="1097280" cy="177800"/>
           </a:xfrm>
           <a:prstGeom prst="rect">
             <a:avLst/>
@@ -8098,103 +8098,6 @@
               <a:t>मानसिकता</a:t>
             </a:r>
             <a:endParaRPr lang="en-US" sz="1000" dirty="0"/>
-          </a:p>
-        </p:txBody>
-      </p:sp>
-      <p:sp>
-        <p:nvSpPr>
-          <p:cNvPr id="56" name="Shape 53"/>
-          <p:cNvSpPr/>
-          <p:nvPr/>
-        </p:nvSpPr>
-        <p:spPr>
-          <a:xfrm>
-            <a:off x="457200" y="4011165"/>
-            <a:ext cx="8449056" cy="347472"/>
-          </a:xfrm>
-          <a:prstGeom prst="rect">
-            <a:avLst/>
-          </a:prstGeom>
-          <a:solidFill>
-            <a:srgbClr val="1D9E75"/>
-          </a:solidFill>
-          <a:ln w="12700">
-            <a:solidFill>
-              <a:srgbClr val="1D9E75"/>
-            </a:solidFill>
-            <a:prstDash val="solid"/>
-          </a:ln>
-        </p:spPr>
-      </p:sp>
-      <p:sp>
-        <p:nvSpPr>
-          <p:cNvPr id="57" name="Text 54"/>
-          <p:cNvSpPr/>
-          <p:nvPr/>
-        </p:nvSpPr>
-        <p:spPr>
-          <a:xfrm>
-            <a:off x="1452677" y="4032504"/>
-            <a:ext cx="6655526" cy="292608"/>
-          </a:xfrm>
-          <a:prstGeom prst="rect">
-            <a:avLst/>
-          </a:prstGeom>
-          <a:noFill/>
-          <a:ln/>
-        </p:spPr>
-        <p:txBody>
-          <a:bodyPr wrap="square" rtlCol="0" anchor="ctr"/>
-          <a:lstStyle/>
-          <a:p>
-            <a:pPr marL="0" indent="0">
-              <a:buNone/>
-            </a:pPr>
-            <a:r>
-              <a:rPr lang="en-US" sz="1200" b="1" dirty="0">
-                <a:solidFill>
-                  <a:srgbClr val="FFFFFF"/>
-                </a:solidFill>
-                <a:latin typeface="Calibri" pitchFamily="34" charset="0"/>
-                <a:ea typeface="Calibri" pitchFamily="34" charset="-122"/>
-                <a:cs typeface="Calibri" pitchFamily="34" charset="-120"/>
-              </a:rPr>
-              <a:t>इनमें से किसी के लिए भी बोर्ड में 90% ज़रूरी नहीं। </a:t>
-            </a:r>
-            <a:r>
-              <a:rPr lang="en-US" sz="1200" dirty="0">
-                <a:solidFill>
-                  <a:srgbClr val="E1F5EE"/>
-                </a:solidFill>
-                <a:latin typeface="Calibri" pitchFamily="34" charset="0"/>
-                <a:ea typeface="Calibri" pitchFamily="34" charset="-122"/>
-                <a:cs typeface="Calibri" pitchFamily="34" charset="-120"/>
-              </a:rPr>
-              <a:t>ये सब सीखी जा सकती हैं। </a:t>
-            </a:r>
-            <a:r>
-              <a:rPr lang="en-US" sz="1200" dirty="0" err="1">
-                <a:solidFill>
-                  <a:srgbClr val="E1F5EE"/>
-                </a:solidFill>
-                <a:latin typeface="Calibri" pitchFamily="34" charset="0"/>
-                <a:ea typeface="Calibri" pitchFamily="34" charset="-122"/>
-                <a:cs typeface="Calibri" pitchFamily="34" charset="-120"/>
-              </a:rPr>
-              <a:t>Pehchaan</a:t>
-            </a:r>
-            <a:r>
-              <a:rPr lang="en-US" sz="1200" dirty="0">
-                <a:solidFill>
-                  <a:srgbClr val="E1F5EE"/>
-                </a:solidFill>
-                <a:latin typeface="Calibri" pitchFamily="34" charset="0"/>
-                <a:ea typeface="Calibri" pitchFamily="34" charset="-122"/>
-                <a:cs typeface="Calibri" pitchFamily="34" charset="-120"/>
-              </a:rPr>
-              <a:t> हर एक सिखाता है।</a:t>
-            </a:r>
-            <a:endParaRPr lang="en-US" sz="1200" dirty="0"/>
           </a:p>
         </p:txBody>
       </p:sp>
@@ -8286,7 +8189,776 @@
           </a:p>
         </p:txBody>
       </p:sp>
+      <p:sp>
+        <p:nvSpPr>
+          <p:cNvPr id="56" name="Shape 53"/>
+          <p:cNvSpPr/>
+          <p:nvPr/>
+        </p:nvSpPr>
+        <p:spPr>
+          <a:xfrm>
+            <a:off x="457200" y="4359964"/>
+            <a:ext cx="8449056" cy="288000"/>
+          </a:xfrm>
+          <a:prstGeom prst="rect">
+            <a:avLst/>
+          </a:prstGeom>
+          <a:solidFill>
+            <a:srgbClr val="1D9E75"/>
+          </a:solidFill>
+          <a:ln w="12700">
+            <a:solidFill>
+              <a:srgbClr val="1D9E75"/>
+            </a:solidFill>
+            <a:prstDash val="solid"/>
+          </a:ln>
+        </p:spPr>
+        <p:txBody>
+          <a:bodyPr/>
+          <a:lstStyle/>
+          <a:p>
+            <a:endParaRPr lang="en-IN" dirty="0"/>
+          </a:p>
+        </p:txBody>
+      </p:sp>
+      <p:sp>
+        <p:nvSpPr>
+          <p:cNvPr id="57" name="Text 54"/>
+          <p:cNvSpPr/>
+          <p:nvPr/>
+        </p:nvSpPr>
+        <p:spPr>
+          <a:xfrm>
+            <a:off x="1452677" y="4395600"/>
+            <a:ext cx="6655526" cy="292608"/>
+          </a:xfrm>
+          <a:prstGeom prst="rect">
+            <a:avLst/>
+          </a:prstGeom>
+          <a:noFill/>
+          <a:ln/>
+        </p:spPr>
+        <p:txBody>
+          <a:bodyPr wrap="square" rtlCol="0" anchor="ctr"/>
+          <a:lstStyle/>
+          <a:p>
+            <a:pPr marL="0" indent="0">
+              <a:buNone/>
+            </a:pPr>
+            <a:r>
+              <a:rPr lang="en-US" sz="1200" b="1" dirty="0">
+                <a:solidFill>
+                  <a:srgbClr val="FFFFFF"/>
+                </a:solidFill>
+                <a:latin typeface="Calibri" pitchFamily="34" charset="0"/>
+                <a:ea typeface="Calibri" pitchFamily="34" charset="-122"/>
+                <a:cs typeface="Calibri" pitchFamily="34" charset="-120"/>
+              </a:rPr>
+              <a:t>इनमें से किसी के लिए भी बोर्ड में 90% ज़रूरी नहीं। </a:t>
+            </a:r>
+            <a:r>
+              <a:rPr lang="en-US" sz="1200" dirty="0">
+                <a:solidFill>
+                  <a:srgbClr val="E1F5EE"/>
+                </a:solidFill>
+                <a:latin typeface="Calibri" pitchFamily="34" charset="0"/>
+                <a:ea typeface="Calibri" pitchFamily="34" charset="-122"/>
+                <a:cs typeface="Calibri" pitchFamily="34" charset="-120"/>
+              </a:rPr>
+              <a:t>ये सब सीखी जा सकती हैं। </a:t>
+            </a:r>
+            <a:r>
+              <a:rPr lang="en-US" sz="1200" dirty="0" err="1">
+                <a:solidFill>
+                  <a:srgbClr val="E1F5EE"/>
+                </a:solidFill>
+                <a:latin typeface="Calibri" pitchFamily="34" charset="0"/>
+                <a:ea typeface="Calibri" pitchFamily="34" charset="-122"/>
+                <a:cs typeface="Calibri" pitchFamily="34" charset="-120"/>
+              </a:rPr>
+              <a:t>Pehchaan</a:t>
+            </a:r>
+            <a:r>
+              <a:rPr lang="en-US" sz="1200" dirty="0">
+                <a:solidFill>
+                  <a:srgbClr val="E1F5EE"/>
+                </a:solidFill>
+                <a:latin typeface="Calibri" pitchFamily="34" charset="0"/>
+                <a:ea typeface="Calibri" pitchFamily="34" charset="-122"/>
+                <a:cs typeface="Calibri" pitchFamily="34" charset="-120"/>
+              </a:rPr>
+              <a:t> हर एक सिखाता है।</a:t>
+            </a:r>
+            <a:endParaRPr lang="en-US" sz="1200" dirty="0"/>
+          </a:p>
+        </p:txBody>
+      </p:sp>
+      <p:sp>
+        <p:nvSpPr>
+          <p:cNvPr id="200" name="AIShape200"/>
+          <p:cNvSpPr/>
+          <p:nvPr/>
+        </p:nvSpPr>
+        <p:spPr>
+          <a:xfrm>
+            <a:off x="457200" y="3587496"/>
+            <a:ext cx="2651760" cy="738000"/>
+          </a:xfrm>
+          <a:prstGeom prst="rect">
+            <a:avLst/>
+          </a:prstGeom>
+          <a:solidFill>
+            <a:srgbClr val="F8FAFC"/>
+          </a:solidFill>
+          <a:ln w="12700">
+            <a:solidFill>
+              <a:srgbClr val="E2E8F0"/>
+            </a:solidFill>
+            <a:prstDash val="solid"/>
+          </a:ln>
+        </p:spPr>
+      </p:sp>
+      <p:sp>
+        <p:nvSpPr>
+          <p:cNvPr id="201" name="AIAccent201"/>
+          <p:cNvSpPr/>
+          <p:nvPr/>
+        </p:nvSpPr>
+        <p:spPr>
+          <a:xfrm>
+            <a:off x="457200" y="3587496"/>
+            <a:ext cx="73152" cy="738000"/>
+          </a:xfrm>
+          <a:prstGeom prst="rect">
+            <a:avLst/>
+          </a:prstGeom>
+          <a:solidFill>
+            <a:srgbClr val="1A1A2E"/>
+          </a:solidFill>
+          <a:ln w="12700">
+            <a:solidFill>
+              <a:srgbClr val="1A1A2E"/>
+            </a:solidFill>
+            <a:prstDash val="solid"/>
+          </a:ln>
+        </p:spPr>
+      </p:sp>
+      <p:sp>
+        <p:nvSpPr>
+          <p:cNvPr id="202" name="AINum202"/>
+          <p:cNvSpPr/>
+          <p:nvPr/>
+        </p:nvSpPr>
+        <p:spPr>
+          <a:xfrm>
+            <a:off x="2798064" y="3642360"/>
+            <a:ext cx="324000" cy="182880"/>
+          </a:xfrm>
+          <a:prstGeom prst="rect">
+            <a:avLst/>
+          </a:prstGeom>
+          <a:noFill/>
+          <a:ln/>
+        </p:spPr>
+        <p:txBody>
+          <a:bodyPr wrap="square" rtlCol="0" anchor="ctr"/>
+          <a:lstStyle/>
+          <a:p>
+            <a:pPr marL="0" indent="0" algn="r">
+              <a:buNone/>
+            </a:pPr>
+            <a:r>
+              <a:rPr lang="en-US" sz="900" b="1" dirty="0">
+                <a:solidFill>
+                  <a:srgbClr val="1A1A2E"/>
+                </a:solidFill>
+                <a:latin typeface="Calibri" pitchFamily="34" charset="0"/>
+              </a:rPr>
+              <a:t>10</a:t>
+            </a:r>
+          </a:p>
+        </p:txBody>
+      </p:sp>
+      <p:sp>
+        <p:nvSpPr>
+          <p:cNvPr id="203" name="AIName203"/>
+          <p:cNvSpPr/>
+          <p:nvPr/>
+        </p:nvSpPr>
+        <p:spPr>
+          <a:xfrm>
+            <a:off x="621552" y="3633216"/>
+            <a:ext cx="2103120" cy="256032"/>
+          </a:xfrm>
+          <a:prstGeom prst="rect">
+            <a:avLst/>
+          </a:prstGeom>
+          <a:noFill/>
+          <a:ln/>
+        </p:spPr>
+        <p:txBody>
+          <a:bodyPr wrap="square" rtlCol="0" anchor="ctr"/>
+          <a:lstStyle/>
+          <a:p>
+            <a:pPr marL="0" indent="0">
+              <a:buNone/>
+            </a:pPr>
+            <a:r>
+              <a:rPr lang="en-US" sz="1300" b="1" dirty="0">
+                <a:solidFill>
+                  <a:srgbClr val="1A1A2E"/>
+                </a:solidFill>
+                <a:latin typeface="Calibri" pitchFamily="34" charset="0"/>
+              </a:rPr>
+              <a:t>AI टूल्स साक्षरता</a:t>
+            </a:r>
+          </a:p>
+        </p:txBody>
+      </p:sp>
+      <p:sp>
+        <p:nvSpPr>
+          <p:cNvPr id="204" name="AIDesc204"/>
+          <p:cNvSpPr/>
+          <p:nvPr/>
+        </p:nvSpPr>
+        <p:spPr>
+          <a:xfrm>
+            <a:off x="621552" y="3907536"/>
+            <a:ext cx="2395728" cy="438912"/>
+          </a:xfrm>
+          <a:prstGeom prst="rect">
+            <a:avLst/>
+          </a:prstGeom>
+          <a:noFill/>
+          <a:ln/>
+        </p:spPr>
+        <p:txBody>
+          <a:bodyPr wrap="square" rtlCol="0" anchor="t"/>
+          <a:lstStyle/>
+          <a:p>
+            <a:pPr marL="0" indent="0">
+              <a:buNone/>
+            </a:pPr>
+            <a:r>
+              <a:rPr lang="en-US" sz="1050" dirty="0">
+                <a:solidFill>
+                  <a:srgbClr val="64748B"/>
+                </a:solidFill>
+                <a:latin typeface="Calibri" pitchFamily="34" charset="0"/>
+              </a:rPr>
+              <a:t>ChatGPT, Gemini, Canva AI जैसे टूल्स से तेज़ काम </a:t>
+            </a:r>
+            <a:r>
+              <a:rPr lang="en-US" sz="1050" dirty="0" err="1">
+                <a:solidFill>
+                  <a:srgbClr val="64748B"/>
+                </a:solidFill>
+                <a:latin typeface="Calibri" pitchFamily="34" charset="0"/>
+              </a:rPr>
+              <a:t>करें</a:t>
+            </a:r>
+            <a:r>
+              <a:rPr lang="en-US" sz="1050" dirty="0">
+                <a:solidFill>
+                  <a:srgbClr val="64748B"/>
+                </a:solidFill>
+                <a:latin typeface="Calibri" pitchFamily="34" charset="0"/>
+              </a:rPr>
+              <a:t>।</a:t>
+            </a:r>
+          </a:p>
+        </p:txBody>
+      </p:sp>
+      <p:sp>
+        <p:nvSpPr>
+          <p:cNvPr id="210" name="AIShape210"/>
+          <p:cNvSpPr/>
+          <p:nvPr/>
+        </p:nvSpPr>
+        <p:spPr>
+          <a:xfrm>
+            <a:off x="3355848" y="3587496"/>
+            <a:ext cx="2651760" cy="738000"/>
+          </a:xfrm>
+          <a:prstGeom prst="rect">
+            <a:avLst/>
+          </a:prstGeom>
+          <a:solidFill>
+            <a:srgbClr val="F8FAFC"/>
+          </a:solidFill>
+          <a:ln w="12700">
+            <a:solidFill>
+              <a:srgbClr val="E2E8F0"/>
+            </a:solidFill>
+            <a:prstDash val="solid"/>
+          </a:ln>
+        </p:spPr>
+      </p:sp>
+      <p:sp>
+        <p:nvSpPr>
+          <p:cNvPr id="211" name="AIAccent211"/>
+          <p:cNvSpPr/>
+          <p:nvPr/>
+        </p:nvSpPr>
+        <p:spPr>
+          <a:xfrm>
+            <a:off x="3355848" y="3587496"/>
+            <a:ext cx="73152" cy="738000"/>
+          </a:xfrm>
+          <a:prstGeom prst="rect">
+            <a:avLst/>
+          </a:prstGeom>
+          <a:solidFill>
+            <a:srgbClr val="1A1A2E"/>
+          </a:solidFill>
+          <a:ln w="12700">
+            <a:solidFill>
+              <a:srgbClr val="1A1A2E"/>
+            </a:solidFill>
+            <a:prstDash val="solid"/>
+          </a:ln>
+        </p:spPr>
+      </p:sp>
+      <p:sp>
+        <p:nvSpPr>
+          <p:cNvPr id="212" name="AINum212"/>
+          <p:cNvSpPr/>
+          <p:nvPr/>
+        </p:nvSpPr>
+        <p:spPr>
+          <a:xfrm>
+            <a:off x="5696712" y="3642360"/>
+            <a:ext cx="324000" cy="182880"/>
+          </a:xfrm>
+          <a:prstGeom prst="rect">
+            <a:avLst/>
+          </a:prstGeom>
+          <a:noFill/>
+          <a:ln/>
+        </p:spPr>
+        <p:txBody>
+          <a:bodyPr wrap="square" rtlCol="0" anchor="ctr"/>
+          <a:lstStyle/>
+          <a:p>
+            <a:pPr marL="0" indent="0" algn="r">
+              <a:buNone/>
+            </a:pPr>
+            <a:r>
+              <a:rPr lang="en-US" sz="900" b="1" dirty="0">
+                <a:solidFill>
+                  <a:srgbClr val="1A1A2E"/>
+                </a:solidFill>
+                <a:latin typeface="Calibri" pitchFamily="34" charset="0"/>
+              </a:rPr>
+              <a:t>11</a:t>
+            </a:r>
+          </a:p>
+        </p:txBody>
+      </p:sp>
+      <p:sp>
+        <p:nvSpPr>
+          <p:cNvPr id="213" name="AIName213"/>
+          <p:cNvSpPr/>
+          <p:nvPr/>
+        </p:nvSpPr>
+        <p:spPr>
+          <a:xfrm>
+            <a:off x="3520200" y="3633216"/>
+            <a:ext cx="2103120" cy="256032"/>
+          </a:xfrm>
+          <a:prstGeom prst="rect">
+            <a:avLst/>
+          </a:prstGeom>
+          <a:noFill/>
+          <a:ln/>
+        </p:spPr>
+        <p:txBody>
+          <a:bodyPr wrap="square" rtlCol="0" anchor="ctr"/>
+          <a:lstStyle/>
+          <a:p>
+            <a:pPr marL="0" indent="0">
+              <a:buNone/>
+            </a:pPr>
+            <a:r>
+              <a:rPr lang="en-US" sz="1300" b="1" dirty="0">
+                <a:solidFill>
+                  <a:srgbClr val="1A1A2E"/>
+                </a:solidFill>
+                <a:latin typeface="Calibri" pitchFamily="34" charset="0"/>
+              </a:rPr>
+              <a:t>प्रॉम्प्ट थिंकिंग</a:t>
+            </a:r>
+          </a:p>
+        </p:txBody>
+      </p:sp>
+      <p:sp>
+        <p:nvSpPr>
+          <p:cNvPr id="214" name="AIDesc214"/>
+          <p:cNvSpPr/>
+          <p:nvPr/>
+        </p:nvSpPr>
+        <p:spPr>
+          <a:xfrm>
+            <a:off x="3520200" y="3907536"/>
+            <a:ext cx="2395728" cy="438912"/>
+          </a:xfrm>
+          <a:prstGeom prst="rect">
+            <a:avLst/>
+          </a:prstGeom>
+          <a:noFill/>
+          <a:ln/>
+        </p:spPr>
+        <p:txBody>
+          <a:bodyPr wrap="square" rtlCol="0" anchor="t"/>
+          <a:lstStyle/>
+          <a:p>
+            <a:pPr marL="0" indent="0">
+              <a:buNone/>
+            </a:pPr>
+            <a:r>
+              <a:rPr lang="en-US" sz="1050" dirty="0">
+                <a:solidFill>
+                  <a:srgbClr val="64748B"/>
+                </a:solidFill>
+                <a:latin typeface="Calibri" pitchFamily="34" charset="0"/>
+              </a:rPr>
+              <a:t>सही सवाल पूछना जानो — सही जवाब </a:t>
+            </a:r>
+            <a:r>
+              <a:rPr lang="en-US" sz="1050" dirty="0" err="1">
+                <a:solidFill>
+                  <a:srgbClr val="64748B"/>
+                </a:solidFill>
+                <a:latin typeface="Calibri" pitchFamily="34" charset="0"/>
+              </a:rPr>
+              <a:t>मिलेगा</a:t>
+            </a:r>
+            <a:r>
+              <a:rPr lang="en-US" sz="1050" dirty="0">
+                <a:solidFill>
+                  <a:srgbClr val="64748B"/>
+                </a:solidFill>
+                <a:latin typeface="Calibri" pitchFamily="34" charset="0"/>
+              </a:rPr>
+              <a:t>।</a:t>
+            </a:r>
+          </a:p>
+        </p:txBody>
+      </p:sp>
+      <p:sp>
+        <p:nvSpPr>
+          <p:cNvPr id="220" name="AIShape220"/>
+          <p:cNvSpPr/>
+          <p:nvPr/>
+        </p:nvSpPr>
+        <p:spPr>
+          <a:xfrm>
+            <a:off x="6254496" y="3587496"/>
+            <a:ext cx="2651760" cy="738000"/>
+          </a:xfrm>
+          <a:prstGeom prst="rect">
+            <a:avLst/>
+          </a:prstGeom>
+          <a:solidFill>
+            <a:srgbClr val="F8FAFC"/>
+          </a:solidFill>
+          <a:ln w="12700">
+            <a:solidFill>
+              <a:srgbClr val="E2E8F0"/>
+            </a:solidFill>
+            <a:prstDash val="solid"/>
+          </a:ln>
+        </p:spPr>
+      </p:sp>
+      <p:sp>
+        <p:nvSpPr>
+          <p:cNvPr id="221" name="AIAccent221"/>
+          <p:cNvSpPr/>
+          <p:nvPr/>
+        </p:nvSpPr>
+        <p:spPr>
+          <a:xfrm>
+            <a:off x="6254496" y="3587496"/>
+            <a:ext cx="73152" cy="738000"/>
+          </a:xfrm>
+          <a:prstGeom prst="rect">
+            <a:avLst/>
+          </a:prstGeom>
+          <a:solidFill>
+            <a:srgbClr val="1A1A2E"/>
+          </a:solidFill>
+          <a:ln w="12700">
+            <a:solidFill>
+              <a:srgbClr val="1A1A2E"/>
+            </a:solidFill>
+            <a:prstDash val="solid"/>
+          </a:ln>
+        </p:spPr>
+      </p:sp>
+      <p:sp>
+        <p:nvSpPr>
+          <p:cNvPr id="222" name="AINum222"/>
+          <p:cNvSpPr/>
+          <p:nvPr/>
+        </p:nvSpPr>
+        <p:spPr>
+          <a:xfrm>
+            <a:off x="8595360" y="3642360"/>
+            <a:ext cx="324000" cy="182880"/>
+          </a:xfrm>
+          <a:prstGeom prst="rect">
+            <a:avLst/>
+          </a:prstGeom>
+          <a:noFill/>
+          <a:ln/>
+        </p:spPr>
+        <p:txBody>
+          <a:bodyPr wrap="square" rtlCol="0" anchor="ctr"/>
+          <a:lstStyle/>
+          <a:p>
+            <a:pPr marL="0" indent="0" algn="r">
+              <a:buNone/>
+            </a:pPr>
+            <a:r>
+              <a:rPr lang="en-US" sz="900" b="1" dirty="0">
+                <a:solidFill>
+                  <a:srgbClr val="1A1A2E"/>
+                </a:solidFill>
+                <a:latin typeface="Calibri" pitchFamily="34" charset="0"/>
+              </a:rPr>
+              <a:t>12</a:t>
+            </a:r>
+          </a:p>
+        </p:txBody>
+      </p:sp>
+      <p:sp>
+        <p:nvSpPr>
+          <p:cNvPr id="223" name="AIName223"/>
+          <p:cNvSpPr/>
+          <p:nvPr/>
+        </p:nvSpPr>
+        <p:spPr>
+          <a:xfrm>
+            <a:off x="6418848" y="3633216"/>
+            <a:ext cx="2103120" cy="256032"/>
+          </a:xfrm>
+          <a:prstGeom prst="rect">
+            <a:avLst/>
+          </a:prstGeom>
+          <a:noFill/>
+          <a:ln/>
+        </p:spPr>
+        <p:txBody>
+          <a:bodyPr wrap="square" rtlCol="0" anchor="ctr"/>
+          <a:lstStyle/>
+          <a:p>
+            <a:pPr marL="0" indent="0">
+              <a:buNone/>
+            </a:pPr>
+            <a:r>
+              <a:rPr lang="en-US" sz="1300" b="1" dirty="0">
+                <a:solidFill>
+                  <a:srgbClr val="1A1A2E"/>
+                </a:solidFill>
+                <a:latin typeface="Calibri" pitchFamily="34" charset="0"/>
+              </a:rPr>
+              <a:t>मानवीय + AI निर्णय</a:t>
+            </a:r>
+          </a:p>
+        </p:txBody>
+      </p:sp>
+      <p:sp>
+        <p:nvSpPr>
+          <p:cNvPr id="224" name="AIDesc224"/>
+          <p:cNvSpPr/>
+          <p:nvPr/>
+        </p:nvSpPr>
+        <p:spPr>
+          <a:xfrm>
+            <a:off x="6418848" y="3907536"/>
+            <a:ext cx="2395728" cy="438912"/>
+          </a:xfrm>
+          <a:prstGeom prst="rect">
+            <a:avLst/>
+          </a:prstGeom>
+          <a:noFill/>
+          <a:ln/>
+        </p:spPr>
+        <p:txBody>
+          <a:bodyPr wrap="square" rtlCol="0" anchor="t"/>
+          <a:lstStyle/>
+          <a:p>
+            <a:r>
+              <a:rPr lang="en-US" sz="1050" dirty="0">
+                <a:solidFill>
+                  <a:srgbClr val="64748B"/>
+                </a:solidFill>
+                <a:latin typeface="Calibri" pitchFamily="34" charset="0"/>
+              </a:rPr>
+              <a:t>AI पर कब भरोसा करें और कब </a:t>
+            </a:r>
+            <a:r>
+              <a:rPr lang="en-US" sz="1050" dirty="0" err="1">
+                <a:solidFill>
+                  <a:srgbClr val="64748B"/>
+                </a:solidFill>
+                <a:latin typeface="Calibri" pitchFamily="34" charset="0"/>
+              </a:rPr>
+              <a:t>खुद</a:t>
+            </a:r>
+            <a:r>
+              <a:rPr lang="en-US" sz="1050" dirty="0">
+                <a:solidFill>
+                  <a:srgbClr val="64748B"/>
+                </a:solidFill>
+                <a:latin typeface="Calibri" pitchFamily="34" charset="0"/>
+              </a:rPr>
+              <a:t> </a:t>
+            </a:r>
+            <a:r>
+              <a:rPr lang="en-US" sz="1050" dirty="0" err="1">
+                <a:solidFill>
+                  <a:srgbClr val="64748B"/>
+                </a:solidFill>
+                <a:latin typeface="Calibri" pitchFamily="34" charset="0"/>
+              </a:rPr>
+              <a:t>सोचें</a:t>
+            </a:r>
+            <a:r>
+              <a:rPr lang="en-US" sz="1050" dirty="0">
+                <a:solidFill>
+                  <a:srgbClr val="64748B"/>
+                </a:solidFill>
+                <a:latin typeface="Calibri" pitchFamily="34" charset="0"/>
+              </a:rPr>
+              <a:t> ।</a:t>
+            </a:r>
+          </a:p>
+        </p:txBody>
+      </p:sp>
+      <p:sp>
+        <p:nvSpPr>
+          <p:cNvPr id="61" name="Rectangle 60">
+            <a:extLst>
+              <a:ext uri="{FF2B5EF4-FFF2-40B4-BE49-F238E27FC236}">
+                <a16:creationId xmlns:a16="http://schemas.microsoft.com/office/drawing/2014/main" id="{BA479D41-A7BF-4338-A0E2-014B4D42A95E}"/>
+              </a:ext>
+            </a:extLst>
+          </p:cNvPr>
+          <p:cNvSpPr/>
+          <p:nvPr/>
+        </p:nvSpPr>
+        <p:spPr>
+          <a:xfrm>
+            <a:off x="5232400" y="4673600"/>
+            <a:ext cx="76200" cy="177800"/>
+          </a:xfrm>
+          <a:prstGeom prst="rect">
+            <a:avLst/>
+          </a:prstGeom>
+          <a:solidFill>
+            <a:srgbClr val="1A1A2E"/>
+          </a:solidFill>
+          <a:ln w="12700" cap="flat" cmpd="sng" algn="ctr">
+            <a:solidFill>
+              <a:srgbClr val="1A1A2E"/>
+            </a:solidFill>
+            <a:prstDash val="solid"/>
+            <a:miter lim="800000"/>
+          </a:ln>
+        </p:spPr>
+        <p:style>
+          <a:lnRef idx="2">
+            <a:schemeClr val="accent1">
+              <a:shade val="15000"/>
+            </a:schemeClr>
+          </a:lnRef>
+          <a:fillRef idx="1">
+            <a:schemeClr val="accent1"/>
+          </a:fillRef>
+          <a:effectRef idx="0">
+            <a:schemeClr val="accent1"/>
+          </a:effectRef>
+          <a:fontRef idx="minor">
+            <a:schemeClr val="lt1"/>
+          </a:fontRef>
+        </p:style>
+        <p:txBody>
+          <a:bodyPr vertOverflow="clip" horzOverflow="clip" rtlCol="0" anchor="t"/>
+          <a:lstStyle/>
+          <a:p>
+            <a:pPr algn="l"/>
+            <a:endParaRPr lang="en-IN"/>
+          </a:p>
+        </p:txBody>
+      </p:sp>
+      <p:sp>
+        <p:nvSpPr>
+          <p:cNvPr id="62" name="TextBox 61">
+            <a:extLst>
+              <a:ext uri="{FF2B5EF4-FFF2-40B4-BE49-F238E27FC236}">
+                <a16:creationId xmlns:a16="http://schemas.microsoft.com/office/drawing/2014/main" id="{D111DE4C-1DBD-4A6F-8685-D7D8B2371365}"/>
+              </a:ext>
+            </a:extLst>
+          </p:cNvPr>
+          <p:cNvSpPr txBox="1"/>
+          <p:nvPr/>
+        </p:nvSpPr>
+        <p:spPr>
+          <a:xfrm>
+            <a:off x="5372100" y="4673600"/>
+            <a:ext cx="1092200" cy="177800"/>
+          </a:xfrm>
+          <a:prstGeom prst="rect">
+            <a:avLst/>
+          </a:prstGeom>
+          <a:noFill/>
+        </p:spPr>
+        <p:txBody>
+          <a:bodyPr vertOverflow="overflow" vert="horz" wrap="square" rtlCol="0" anchor="ctr" anchorCtr="0">
+            <a:noAutofit/>
+          </a:bodyPr>
+          <a:lstStyle/>
+          <a:p>
+            <a:pPr algn="l"/>
+            <a:r>
+              <a:rPr lang="en-IN" sz="1000" b="1">
+                <a:solidFill>
+                  <a:srgbClr val="1A1A2E"/>
+                </a:solidFill>
+                <a:latin typeface="Calibri"/>
+                <a:ea typeface="Calibri"/>
+                <a:cs typeface="Calibri"/>
+              </a:rPr>
+              <a:t>AI </a:t>
+            </a:r>
+            <a:r>
+              <a:rPr lang="hi-IN" sz="1000" b="1">
+                <a:solidFill>
+                  <a:srgbClr val="1A1A2E"/>
+                </a:solidFill>
+                <a:latin typeface="Calibri"/>
+                <a:ea typeface="Calibri"/>
+              </a:rPr>
+              <a:t>ज्ञान</a:t>
+            </a:r>
+            <a:endParaRPr lang="en-IN" sz="1000" b="1">
+              <a:solidFill>
+                <a:srgbClr val="1A1A2E"/>
+              </a:solidFill>
+              <a:latin typeface="Calibri"/>
+              <a:ea typeface="Calibri"/>
+              <a:cs typeface="Calibri"/>
+            </a:endParaRPr>
+          </a:p>
+        </p:txBody>
+      </p:sp>
     </p:spTree>
+    <p:extLst>
+      <p:ext uri="{BB962C8B-B14F-4D97-AF65-F5344CB8AC3E}">
+        <p14:creationId xmlns:p14="http://schemas.microsoft.com/office/powerpoint/2010/main" val="580196071"/>
+      </p:ext>
+    </p:extLst>
   </p:cSld>
   <p:clrMapOvr>
     <a:masterClrMapping/>
@@ -13480,4 +14152,26 @@
     </a:ext>
   </a:extLst>
 </a:theme>
+</file>
+
+<file path=ppt/webextensions/taskpanes.xml><?xml version="1.0" encoding="utf-8"?>
+<wetp:taskpanes xmlns:wetp="http://schemas.microsoft.com/office/webextensions/taskpanes/2010/11">
+  <wetp:taskpane dockstate="right" visibility="0" width="438" row="6">
+    <wetp:webextensionref xmlns:r="http://schemas.openxmlformats.org/officeDocument/2006/relationships" r:id="rId1"/>
+  </wetp:taskpane>
+</wetp:taskpanes>
+</file>
+
+<file path=ppt/webextensions/webextension1.xml><?xml version="1.0" encoding="utf-8"?>
+<we:webextension xmlns:we="http://schemas.microsoft.com/office/webextensions/webextension/2010/11" id="{64127AE2-60FE-4F09-A124-D14770599469}">
+  <we:reference id="wa200010001" version="1.0.0.1" store="en-US" storeType="OMEX"/>
+  <we:alternateReferences>
+    <we:reference id="wa200010001" version="1.0.0.1" store="WA200010001" storeType="OMEX"/>
+  </we:alternateReferences>
+  <we:properties>
+    <we:property name="claude.fileId" value="&quot;88de0e12-66e6-48a8-ba57-f420d18e9c70&quot;"/>
+  </we:properties>
+  <we:bindings/>
+  <we:snapshot xmlns:r="http://schemas.openxmlformats.org/officeDocument/2006/relationships"/>
+</we:webextension>
 </file>